--- a/eitannitzaniWebsite/תמונות/p.pptx
+++ b/eitannitzaniWebsite/תמונות/p.pptx
@@ -3323,18 +3323,18 @@
       </p:grpSpPr>
       <p:sp>
         <p:nvSpPr>
-          <p:cNvPr id="2" name="כותרת 1">
-            <a:extLst>
-              <a:ext uri="{FF2B5EF4-FFF2-40B4-BE49-F238E27FC236}">
-                <a16:creationId xmlns:a16="http://schemas.microsoft.com/office/drawing/2014/main" id="{26586F7D-5D80-C4D7-F4C3-181AA044C02C}"/>
-              </a:ext>
-            </a:extLst>
-          </p:cNvPr>
-          <p:cNvSpPr>
-            <a:spLocks noGrp="1"/>
-          </p:cNvSpPr>
-          <p:nvPr>
-            <p:ph type="ctrTitle"/>
+          <p:cNvPr id="3" name="כותרת משנה 2">
+            <a:extLst>
+              <a:ext uri="{FF2B5EF4-FFF2-40B4-BE49-F238E27FC236}">
+                <a16:creationId xmlns:a16="http://schemas.microsoft.com/office/drawing/2014/main" id="{BD9AEFB5-B2F0-F6C0-1164-4F76FF67B45A}"/>
+              </a:ext>
+            </a:extLst>
+          </p:cNvPr>
+          <p:cNvSpPr>
+            <a:spLocks noGrp="1"/>
+          </p:cNvSpPr>
+          <p:nvPr>
+            <p:ph type="subTitle" idx="1"/>
           </p:nvPr>
         </p:nvSpPr>
         <p:spPr/>
@@ -3342,35 +3342,1526 @@
           <a:bodyPr/>
           <a:lstStyle/>
           <a:p>
-            <a:endParaRPr lang="he-IL"/>
-          </a:p>
-        </p:txBody>
-      </p:sp>
-      <p:sp>
-        <p:nvSpPr>
-          <p:cNvPr id="3" name="כותרת משנה 2">
-            <a:extLst>
-              <a:ext uri="{FF2B5EF4-FFF2-40B4-BE49-F238E27FC236}">
-                <a16:creationId xmlns:a16="http://schemas.microsoft.com/office/drawing/2014/main" id="{BD9AEFB5-B2F0-F6C0-1164-4F76FF67B45A}"/>
-              </a:ext>
-            </a:extLst>
-          </p:cNvPr>
-          <p:cNvSpPr>
-            <a:spLocks noGrp="1"/>
-          </p:cNvSpPr>
-          <p:nvPr>
-            <p:ph type="subTitle" idx="1"/>
-          </p:nvPr>
-        </p:nvSpPr>
-        <p:spPr/>
-        <p:txBody>
-          <a:bodyPr/>
-          <a:lstStyle/>
-          <a:p>
-            <a:endParaRPr lang="he-IL"/>
-          </a:p>
-        </p:txBody>
-      </p:sp>
+            <a:endParaRPr lang="he-IL" dirty="0"/>
+          </a:p>
+        </p:txBody>
+      </p:sp>
+      <p:sp>
+        <p:nvSpPr>
+          <p:cNvPr id="4" name="מלבן: פינות מעוגלות 3">
+            <a:extLst>
+              <a:ext uri="{FF2B5EF4-FFF2-40B4-BE49-F238E27FC236}">
+                <a16:creationId xmlns:a16="http://schemas.microsoft.com/office/drawing/2014/main" id="{A6FB65FD-79A3-CCFF-9FF5-D0D19F9013F6}"/>
+              </a:ext>
+            </a:extLst>
+          </p:cNvPr>
+          <p:cNvSpPr/>
+          <p:nvPr/>
+        </p:nvSpPr>
+        <p:spPr>
+          <a:xfrm>
+            <a:off x="4212336" y="2321878"/>
+            <a:ext cx="1069848" cy="658368"/>
+          </a:xfrm>
+          <a:prstGeom prst="roundRect">
+            <a:avLst/>
+          </a:prstGeom>
+        </p:spPr>
+        <p:style>
+          <a:lnRef idx="2">
+            <a:schemeClr val="accent1">
+              <a:shade val="15000"/>
+            </a:schemeClr>
+          </a:lnRef>
+          <a:fillRef idx="1">
+            <a:schemeClr val="accent1"/>
+          </a:fillRef>
+          <a:effectRef idx="0">
+            <a:schemeClr val="accent1"/>
+          </a:effectRef>
+          <a:fontRef idx="minor">
+            <a:schemeClr val="lt1"/>
+          </a:fontRef>
+        </p:style>
+        <p:txBody>
+          <a:bodyPr rtlCol="1" anchor="ctr"/>
+          <a:lstStyle/>
+          <a:p>
+            <a:pPr algn="ctr"/>
+            <a:r>
+              <a:rPr lang="he-IL" dirty="0"/>
+              <a:t>עמוד בית</a:t>
+            </a:r>
+          </a:p>
+        </p:txBody>
+      </p:sp>
+      <p:sp>
+        <p:nvSpPr>
+          <p:cNvPr id="6" name="מלבן: פינות מעוגלות 5">
+            <a:extLst>
+              <a:ext uri="{FF2B5EF4-FFF2-40B4-BE49-F238E27FC236}">
+                <a16:creationId xmlns:a16="http://schemas.microsoft.com/office/drawing/2014/main" id="{C5C8EA70-11BA-6E83-0EA3-784593A7C584}"/>
+              </a:ext>
+            </a:extLst>
+          </p:cNvPr>
+          <p:cNvSpPr/>
+          <p:nvPr/>
+        </p:nvSpPr>
+        <p:spPr>
+          <a:xfrm>
+            <a:off x="4212336" y="1621536"/>
+            <a:ext cx="1069848" cy="658368"/>
+          </a:xfrm>
+          <a:prstGeom prst="roundRect">
+            <a:avLst/>
+          </a:prstGeom>
+        </p:spPr>
+        <p:style>
+          <a:lnRef idx="2">
+            <a:schemeClr val="accent1">
+              <a:shade val="15000"/>
+            </a:schemeClr>
+          </a:lnRef>
+          <a:fillRef idx="1">
+            <a:schemeClr val="accent1"/>
+          </a:fillRef>
+          <a:effectRef idx="0">
+            <a:schemeClr val="accent1"/>
+          </a:effectRef>
+          <a:fontRef idx="minor">
+            <a:schemeClr val="lt1"/>
+          </a:fontRef>
+        </p:style>
+        <p:txBody>
+          <a:bodyPr rtlCol="1" anchor="ctr"/>
+          <a:lstStyle/>
+          <a:p>
+            <a:pPr algn="ctr"/>
+            <a:r>
+              <a:rPr lang="he-IL" dirty="0"/>
+              <a:t>הרשמה לאתר</a:t>
+            </a:r>
+          </a:p>
+        </p:txBody>
+      </p:sp>
+      <p:sp>
+        <p:nvSpPr>
+          <p:cNvPr id="7" name="מלבן: פינות מעוגלות 6">
+            <a:extLst>
+              <a:ext uri="{FF2B5EF4-FFF2-40B4-BE49-F238E27FC236}">
+                <a16:creationId xmlns:a16="http://schemas.microsoft.com/office/drawing/2014/main" id="{C1D8B514-DF10-24CF-BEB7-2F2184304256}"/>
+              </a:ext>
+            </a:extLst>
+          </p:cNvPr>
+          <p:cNvSpPr/>
+          <p:nvPr/>
+        </p:nvSpPr>
+        <p:spPr>
+          <a:xfrm>
+            <a:off x="4209289" y="3084576"/>
+            <a:ext cx="1069848" cy="658368"/>
+          </a:xfrm>
+          <a:prstGeom prst="roundRect">
+            <a:avLst/>
+          </a:prstGeom>
+        </p:spPr>
+        <p:style>
+          <a:lnRef idx="2">
+            <a:schemeClr val="accent1">
+              <a:shade val="15000"/>
+            </a:schemeClr>
+          </a:lnRef>
+          <a:fillRef idx="1">
+            <a:schemeClr val="accent1"/>
+          </a:fillRef>
+          <a:effectRef idx="0">
+            <a:schemeClr val="accent1"/>
+          </a:effectRef>
+          <a:fontRef idx="minor">
+            <a:schemeClr val="lt1"/>
+          </a:fontRef>
+        </p:style>
+        <p:txBody>
+          <a:bodyPr rtlCol="1" anchor="ctr"/>
+          <a:lstStyle/>
+          <a:p>
+            <a:pPr algn="ctr"/>
+            <a:r>
+              <a:rPr lang="en-US" dirty="0" err="1"/>
+              <a:t>myform</a:t>
+            </a:r>
+            <a:endParaRPr lang="he-IL" dirty="0"/>
+          </a:p>
+        </p:txBody>
+      </p:sp>
+      <p:sp>
+        <p:nvSpPr>
+          <p:cNvPr id="8" name="מלבן: פינות מעוגלות 7">
+            <a:extLst>
+              <a:ext uri="{FF2B5EF4-FFF2-40B4-BE49-F238E27FC236}">
+                <a16:creationId xmlns:a16="http://schemas.microsoft.com/office/drawing/2014/main" id="{FC4BA247-9A86-CBD7-E82B-EA25E50383AB}"/>
+              </a:ext>
+            </a:extLst>
+          </p:cNvPr>
+          <p:cNvSpPr/>
+          <p:nvPr/>
+        </p:nvSpPr>
+        <p:spPr>
+          <a:xfrm>
+            <a:off x="6303264" y="1905000"/>
+            <a:ext cx="1069848" cy="658368"/>
+          </a:xfrm>
+          <a:prstGeom prst="roundRect">
+            <a:avLst/>
+          </a:prstGeom>
+        </p:spPr>
+        <p:style>
+          <a:lnRef idx="2">
+            <a:schemeClr val="accent1">
+              <a:shade val="15000"/>
+            </a:schemeClr>
+          </a:lnRef>
+          <a:fillRef idx="1">
+            <a:schemeClr val="accent1"/>
+          </a:fillRef>
+          <a:effectRef idx="0">
+            <a:schemeClr val="accent1"/>
+          </a:effectRef>
+          <a:fontRef idx="minor">
+            <a:schemeClr val="lt1"/>
+          </a:fontRef>
+        </p:style>
+        <p:txBody>
+          <a:bodyPr rtlCol="1" anchor="ctr"/>
+          <a:lstStyle/>
+          <a:p>
+            <a:pPr algn="ctr"/>
+            <a:endParaRPr lang="he-IL"/>
+          </a:p>
+        </p:txBody>
+      </p:sp>
+      <p:sp>
+        <p:nvSpPr>
+          <p:cNvPr id="9" name="מלבן: פינות מעוגלות 8">
+            <a:extLst>
+              <a:ext uri="{FF2B5EF4-FFF2-40B4-BE49-F238E27FC236}">
+                <a16:creationId xmlns:a16="http://schemas.microsoft.com/office/drawing/2014/main" id="{BF7DEEF3-8831-471C-8033-002F8D1DD8D9}"/>
+              </a:ext>
+            </a:extLst>
+          </p:cNvPr>
+          <p:cNvSpPr/>
+          <p:nvPr/>
+        </p:nvSpPr>
+        <p:spPr>
+          <a:xfrm>
+            <a:off x="6455664" y="2057400"/>
+            <a:ext cx="1069848" cy="658368"/>
+          </a:xfrm>
+          <a:prstGeom prst="roundRect">
+            <a:avLst/>
+          </a:prstGeom>
+        </p:spPr>
+        <p:style>
+          <a:lnRef idx="2">
+            <a:schemeClr val="accent1">
+              <a:shade val="15000"/>
+            </a:schemeClr>
+          </a:lnRef>
+          <a:fillRef idx="1">
+            <a:schemeClr val="accent1"/>
+          </a:fillRef>
+          <a:effectRef idx="0">
+            <a:schemeClr val="accent1"/>
+          </a:effectRef>
+          <a:fontRef idx="minor">
+            <a:schemeClr val="lt1"/>
+          </a:fontRef>
+        </p:style>
+        <p:txBody>
+          <a:bodyPr rtlCol="1" anchor="ctr"/>
+          <a:lstStyle/>
+          <a:p>
+            <a:pPr algn="ctr"/>
+            <a:endParaRPr lang="he-IL"/>
+          </a:p>
+        </p:txBody>
+      </p:sp>
+      <p:sp>
+        <p:nvSpPr>
+          <p:cNvPr id="10" name="מלבן: פינות מעוגלות 9">
+            <a:extLst>
+              <a:ext uri="{FF2B5EF4-FFF2-40B4-BE49-F238E27FC236}">
+                <a16:creationId xmlns:a16="http://schemas.microsoft.com/office/drawing/2014/main" id="{59EDFEE4-31BD-CFD8-31B1-EF51D3396FB1}"/>
+              </a:ext>
+            </a:extLst>
+          </p:cNvPr>
+          <p:cNvSpPr/>
+          <p:nvPr/>
+        </p:nvSpPr>
+        <p:spPr>
+          <a:xfrm>
+            <a:off x="2206752" y="855313"/>
+            <a:ext cx="1069848" cy="658368"/>
+          </a:xfrm>
+          <a:prstGeom prst="roundRect">
+            <a:avLst/>
+          </a:prstGeom>
+        </p:spPr>
+        <p:style>
+          <a:lnRef idx="2">
+            <a:schemeClr val="accent1">
+              <a:shade val="15000"/>
+            </a:schemeClr>
+          </a:lnRef>
+          <a:fillRef idx="1">
+            <a:schemeClr val="accent1"/>
+          </a:fillRef>
+          <a:effectRef idx="0">
+            <a:schemeClr val="accent1"/>
+          </a:effectRef>
+          <a:fontRef idx="minor">
+            <a:schemeClr val="lt1"/>
+          </a:fontRef>
+        </p:style>
+        <p:txBody>
+          <a:bodyPr rtlCol="1" anchor="ctr"/>
+          <a:lstStyle/>
+          <a:p>
+            <a:pPr algn="ctr"/>
+            <a:r>
+              <a:rPr lang="en-US" dirty="0"/>
+              <a:t>Login</a:t>
+            </a:r>
+            <a:endParaRPr lang="he-IL" dirty="0"/>
+          </a:p>
+        </p:txBody>
+      </p:sp>
+      <p:sp>
+        <p:nvSpPr>
+          <p:cNvPr id="11" name="מלבן: פינות מעוגלות 10">
+            <a:extLst>
+              <a:ext uri="{FF2B5EF4-FFF2-40B4-BE49-F238E27FC236}">
+                <a16:creationId xmlns:a16="http://schemas.microsoft.com/office/drawing/2014/main" id="{6B91ACEB-9525-8DE3-72CE-C09119980F6F}"/>
+              </a:ext>
+            </a:extLst>
+          </p:cNvPr>
+          <p:cNvSpPr/>
+          <p:nvPr/>
+        </p:nvSpPr>
+        <p:spPr>
+          <a:xfrm>
+            <a:off x="6760464" y="2362200"/>
+            <a:ext cx="1069848" cy="658368"/>
+          </a:xfrm>
+          <a:prstGeom prst="roundRect">
+            <a:avLst/>
+          </a:prstGeom>
+        </p:spPr>
+        <p:style>
+          <a:lnRef idx="2">
+            <a:schemeClr val="accent1">
+              <a:shade val="15000"/>
+            </a:schemeClr>
+          </a:lnRef>
+          <a:fillRef idx="1">
+            <a:schemeClr val="accent1"/>
+          </a:fillRef>
+          <a:effectRef idx="0">
+            <a:schemeClr val="accent1"/>
+          </a:effectRef>
+          <a:fontRef idx="minor">
+            <a:schemeClr val="lt1"/>
+          </a:fontRef>
+        </p:style>
+        <p:txBody>
+          <a:bodyPr rtlCol="1" anchor="ctr"/>
+          <a:lstStyle/>
+          <a:p>
+            <a:pPr algn="ctr"/>
+            <a:endParaRPr lang="he-IL"/>
+          </a:p>
+        </p:txBody>
+      </p:sp>
+      <p:sp>
+        <p:nvSpPr>
+          <p:cNvPr id="12" name="מלבן: פינות מעוגלות 11">
+            <a:extLst>
+              <a:ext uri="{FF2B5EF4-FFF2-40B4-BE49-F238E27FC236}">
+                <a16:creationId xmlns:a16="http://schemas.microsoft.com/office/drawing/2014/main" id="{274E66FB-461A-7F0D-067C-E8BF7E85A495}"/>
+              </a:ext>
+            </a:extLst>
+          </p:cNvPr>
+          <p:cNvSpPr/>
+          <p:nvPr/>
+        </p:nvSpPr>
+        <p:spPr>
+          <a:xfrm>
+            <a:off x="6912864" y="2514600"/>
+            <a:ext cx="1069848" cy="658368"/>
+          </a:xfrm>
+          <a:prstGeom prst="roundRect">
+            <a:avLst/>
+          </a:prstGeom>
+        </p:spPr>
+        <p:style>
+          <a:lnRef idx="2">
+            <a:schemeClr val="accent1">
+              <a:shade val="15000"/>
+            </a:schemeClr>
+          </a:lnRef>
+          <a:fillRef idx="1">
+            <a:schemeClr val="accent1"/>
+          </a:fillRef>
+          <a:effectRef idx="0">
+            <a:schemeClr val="accent1"/>
+          </a:effectRef>
+          <a:fontRef idx="minor">
+            <a:schemeClr val="lt1"/>
+          </a:fontRef>
+        </p:style>
+        <p:txBody>
+          <a:bodyPr rtlCol="1" anchor="ctr"/>
+          <a:lstStyle/>
+          <a:p>
+            <a:pPr algn="ctr"/>
+            <a:endParaRPr lang="he-IL"/>
+          </a:p>
+        </p:txBody>
+      </p:sp>
+      <p:sp>
+        <p:nvSpPr>
+          <p:cNvPr id="13" name="מלבן: פינות מעוגלות 12">
+            <a:extLst>
+              <a:ext uri="{FF2B5EF4-FFF2-40B4-BE49-F238E27FC236}">
+                <a16:creationId xmlns:a16="http://schemas.microsoft.com/office/drawing/2014/main" id="{46DA348B-C7C0-17B7-26C0-DC988285839B}"/>
+              </a:ext>
+            </a:extLst>
+          </p:cNvPr>
+          <p:cNvSpPr/>
+          <p:nvPr/>
+        </p:nvSpPr>
+        <p:spPr>
+          <a:xfrm>
+            <a:off x="7065264" y="2667000"/>
+            <a:ext cx="1069848" cy="658368"/>
+          </a:xfrm>
+          <a:prstGeom prst="roundRect">
+            <a:avLst/>
+          </a:prstGeom>
+        </p:spPr>
+        <p:style>
+          <a:lnRef idx="2">
+            <a:schemeClr val="accent1">
+              <a:shade val="15000"/>
+            </a:schemeClr>
+          </a:lnRef>
+          <a:fillRef idx="1">
+            <a:schemeClr val="accent1"/>
+          </a:fillRef>
+          <a:effectRef idx="0">
+            <a:schemeClr val="accent1"/>
+          </a:effectRef>
+          <a:fontRef idx="minor">
+            <a:schemeClr val="lt1"/>
+          </a:fontRef>
+        </p:style>
+        <p:txBody>
+          <a:bodyPr rtlCol="1" anchor="ctr"/>
+          <a:lstStyle/>
+          <a:p>
+            <a:pPr algn="ctr"/>
+            <a:endParaRPr lang="he-IL"/>
+          </a:p>
+        </p:txBody>
+      </p:sp>
+      <p:sp>
+        <p:nvSpPr>
+          <p:cNvPr id="14" name="מלבן: פינות מעוגלות 13">
+            <a:extLst>
+              <a:ext uri="{FF2B5EF4-FFF2-40B4-BE49-F238E27FC236}">
+                <a16:creationId xmlns:a16="http://schemas.microsoft.com/office/drawing/2014/main" id="{7225E5B2-75D8-44A9-7C05-CB0DBFEF0F8A}"/>
+              </a:ext>
+            </a:extLst>
+          </p:cNvPr>
+          <p:cNvSpPr/>
+          <p:nvPr/>
+        </p:nvSpPr>
+        <p:spPr>
+          <a:xfrm>
+            <a:off x="7217664" y="2819400"/>
+            <a:ext cx="1069848" cy="658368"/>
+          </a:xfrm>
+          <a:prstGeom prst="roundRect">
+            <a:avLst/>
+          </a:prstGeom>
+        </p:spPr>
+        <p:style>
+          <a:lnRef idx="2">
+            <a:schemeClr val="accent1">
+              <a:shade val="15000"/>
+            </a:schemeClr>
+          </a:lnRef>
+          <a:fillRef idx="1">
+            <a:schemeClr val="accent1"/>
+          </a:fillRef>
+          <a:effectRef idx="0">
+            <a:schemeClr val="accent1"/>
+          </a:effectRef>
+          <a:fontRef idx="minor">
+            <a:schemeClr val="lt1"/>
+          </a:fontRef>
+        </p:style>
+        <p:txBody>
+          <a:bodyPr rtlCol="1" anchor="ctr"/>
+          <a:lstStyle/>
+          <a:p>
+            <a:pPr algn="ctr"/>
+            <a:endParaRPr lang="he-IL"/>
+          </a:p>
+        </p:txBody>
+      </p:sp>
+      <p:sp>
+        <p:nvSpPr>
+          <p:cNvPr id="15" name="מלבן: פינות מעוגלות 14">
+            <a:extLst>
+              <a:ext uri="{FF2B5EF4-FFF2-40B4-BE49-F238E27FC236}">
+                <a16:creationId xmlns:a16="http://schemas.microsoft.com/office/drawing/2014/main" id="{1980FB1B-463F-E52F-3D5B-AC658303CED0}"/>
+              </a:ext>
+            </a:extLst>
+          </p:cNvPr>
+          <p:cNvSpPr/>
+          <p:nvPr/>
+        </p:nvSpPr>
+        <p:spPr>
+          <a:xfrm>
+            <a:off x="7370064" y="2971800"/>
+            <a:ext cx="1069848" cy="658368"/>
+          </a:xfrm>
+          <a:prstGeom prst="roundRect">
+            <a:avLst/>
+          </a:prstGeom>
+        </p:spPr>
+        <p:style>
+          <a:lnRef idx="2">
+            <a:schemeClr val="accent1">
+              <a:shade val="15000"/>
+            </a:schemeClr>
+          </a:lnRef>
+          <a:fillRef idx="1">
+            <a:schemeClr val="accent1"/>
+          </a:fillRef>
+          <a:effectRef idx="0">
+            <a:schemeClr val="accent1"/>
+          </a:effectRef>
+          <a:fontRef idx="minor">
+            <a:schemeClr val="lt1"/>
+          </a:fontRef>
+        </p:style>
+        <p:txBody>
+          <a:bodyPr rtlCol="1" anchor="ctr"/>
+          <a:lstStyle/>
+          <a:p>
+            <a:pPr algn="ctr"/>
+            <a:endParaRPr lang="he-IL"/>
+          </a:p>
+        </p:txBody>
+      </p:sp>
+      <p:sp>
+        <p:nvSpPr>
+          <p:cNvPr id="16" name="מלבן: פינות מעוגלות 15">
+            <a:extLst>
+              <a:ext uri="{FF2B5EF4-FFF2-40B4-BE49-F238E27FC236}">
+                <a16:creationId xmlns:a16="http://schemas.microsoft.com/office/drawing/2014/main" id="{26BBD8BD-9C83-D9AB-A6D2-ADF5D70CB5CE}"/>
+              </a:ext>
+            </a:extLst>
+          </p:cNvPr>
+          <p:cNvSpPr/>
+          <p:nvPr/>
+        </p:nvSpPr>
+        <p:spPr>
+          <a:xfrm>
+            <a:off x="7522464" y="3124200"/>
+            <a:ext cx="1069848" cy="658368"/>
+          </a:xfrm>
+          <a:prstGeom prst="roundRect">
+            <a:avLst/>
+          </a:prstGeom>
+        </p:spPr>
+        <p:style>
+          <a:lnRef idx="2">
+            <a:schemeClr val="accent1">
+              <a:shade val="15000"/>
+            </a:schemeClr>
+          </a:lnRef>
+          <a:fillRef idx="1">
+            <a:schemeClr val="accent1"/>
+          </a:fillRef>
+          <a:effectRef idx="0">
+            <a:schemeClr val="accent1"/>
+          </a:effectRef>
+          <a:fontRef idx="minor">
+            <a:schemeClr val="lt1"/>
+          </a:fontRef>
+        </p:style>
+        <p:txBody>
+          <a:bodyPr rtlCol="1" anchor="ctr"/>
+          <a:lstStyle/>
+          <a:p>
+            <a:pPr algn="ctr"/>
+            <a:endParaRPr lang="he-IL"/>
+          </a:p>
+        </p:txBody>
+      </p:sp>
+      <p:sp>
+        <p:nvSpPr>
+          <p:cNvPr id="17" name="מלבן: פינות מעוגלות 16">
+            <a:extLst>
+              <a:ext uri="{FF2B5EF4-FFF2-40B4-BE49-F238E27FC236}">
+                <a16:creationId xmlns:a16="http://schemas.microsoft.com/office/drawing/2014/main" id="{1377796F-076F-4BD8-656E-2051E0B7C044}"/>
+              </a:ext>
+            </a:extLst>
+          </p:cNvPr>
+          <p:cNvSpPr/>
+          <p:nvPr/>
+        </p:nvSpPr>
+        <p:spPr>
+          <a:xfrm>
+            <a:off x="7674864" y="3276600"/>
+            <a:ext cx="1069848" cy="658368"/>
+          </a:xfrm>
+          <a:prstGeom prst="roundRect">
+            <a:avLst/>
+          </a:prstGeom>
+        </p:spPr>
+        <p:style>
+          <a:lnRef idx="2">
+            <a:schemeClr val="accent1">
+              <a:shade val="15000"/>
+            </a:schemeClr>
+          </a:lnRef>
+          <a:fillRef idx="1">
+            <a:schemeClr val="accent1"/>
+          </a:fillRef>
+          <a:effectRef idx="0">
+            <a:schemeClr val="accent1"/>
+          </a:effectRef>
+          <a:fontRef idx="minor">
+            <a:schemeClr val="lt1"/>
+          </a:fontRef>
+        </p:style>
+        <p:txBody>
+          <a:bodyPr rtlCol="1" anchor="ctr"/>
+          <a:lstStyle/>
+          <a:p>
+            <a:pPr algn="ctr"/>
+            <a:endParaRPr lang="he-IL"/>
+          </a:p>
+        </p:txBody>
+      </p:sp>
+      <p:sp>
+        <p:nvSpPr>
+          <p:cNvPr id="18" name="מלבן: פינות מעוגלות 17">
+            <a:extLst>
+              <a:ext uri="{FF2B5EF4-FFF2-40B4-BE49-F238E27FC236}">
+                <a16:creationId xmlns:a16="http://schemas.microsoft.com/office/drawing/2014/main" id="{682C323A-A4D4-BD24-D2F0-763641A17A6E}"/>
+              </a:ext>
+            </a:extLst>
+          </p:cNvPr>
+          <p:cNvSpPr/>
+          <p:nvPr/>
+        </p:nvSpPr>
+        <p:spPr>
+          <a:xfrm>
+            <a:off x="7827264" y="3429000"/>
+            <a:ext cx="1069848" cy="658368"/>
+          </a:xfrm>
+          <a:prstGeom prst="roundRect">
+            <a:avLst/>
+          </a:prstGeom>
+        </p:spPr>
+        <p:style>
+          <a:lnRef idx="2">
+            <a:schemeClr val="accent1">
+              <a:shade val="15000"/>
+            </a:schemeClr>
+          </a:lnRef>
+          <a:fillRef idx="1">
+            <a:schemeClr val="accent1"/>
+          </a:fillRef>
+          <a:effectRef idx="0">
+            <a:schemeClr val="accent1"/>
+          </a:effectRef>
+          <a:fontRef idx="minor">
+            <a:schemeClr val="lt1"/>
+          </a:fontRef>
+        </p:style>
+        <p:txBody>
+          <a:bodyPr rtlCol="1" anchor="ctr"/>
+          <a:lstStyle/>
+          <a:p>
+            <a:pPr algn="ctr"/>
+            <a:endParaRPr lang="he-IL"/>
+          </a:p>
+        </p:txBody>
+      </p:sp>
+      <p:sp>
+        <p:nvSpPr>
+          <p:cNvPr id="19" name="מלבן: פינות מעוגלות 18">
+            <a:extLst>
+              <a:ext uri="{FF2B5EF4-FFF2-40B4-BE49-F238E27FC236}">
+                <a16:creationId xmlns:a16="http://schemas.microsoft.com/office/drawing/2014/main" id="{E02464B8-43CA-383D-3891-71648F8AD679}"/>
+              </a:ext>
+            </a:extLst>
+          </p:cNvPr>
+          <p:cNvSpPr/>
+          <p:nvPr/>
+        </p:nvSpPr>
+        <p:spPr>
+          <a:xfrm>
+            <a:off x="7979664" y="3581400"/>
+            <a:ext cx="1069848" cy="658368"/>
+          </a:xfrm>
+          <a:prstGeom prst="roundRect">
+            <a:avLst/>
+          </a:prstGeom>
+        </p:spPr>
+        <p:style>
+          <a:lnRef idx="2">
+            <a:schemeClr val="accent1">
+              <a:shade val="15000"/>
+            </a:schemeClr>
+          </a:lnRef>
+          <a:fillRef idx="1">
+            <a:schemeClr val="accent1"/>
+          </a:fillRef>
+          <a:effectRef idx="0">
+            <a:schemeClr val="accent1"/>
+          </a:effectRef>
+          <a:fontRef idx="minor">
+            <a:schemeClr val="lt1"/>
+          </a:fontRef>
+        </p:style>
+        <p:txBody>
+          <a:bodyPr rtlCol="1" anchor="ctr"/>
+          <a:lstStyle/>
+          <a:p>
+            <a:pPr algn="ctr"/>
+            <a:endParaRPr lang="he-IL"/>
+          </a:p>
+        </p:txBody>
+      </p:sp>
+      <p:sp>
+        <p:nvSpPr>
+          <p:cNvPr id="20" name="מלבן: פינות מעוגלות 19">
+            <a:extLst>
+              <a:ext uri="{FF2B5EF4-FFF2-40B4-BE49-F238E27FC236}">
+                <a16:creationId xmlns:a16="http://schemas.microsoft.com/office/drawing/2014/main" id="{852F44A2-C491-92A3-D4F0-BAA3669EFE76}"/>
+              </a:ext>
+            </a:extLst>
+          </p:cNvPr>
+          <p:cNvSpPr/>
+          <p:nvPr/>
+        </p:nvSpPr>
+        <p:spPr>
+          <a:xfrm>
+            <a:off x="8132064" y="3733800"/>
+            <a:ext cx="1069848" cy="658368"/>
+          </a:xfrm>
+          <a:prstGeom prst="roundRect">
+            <a:avLst/>
+          </a:prstGeom>
+        </p:spPr>
+        <p:style>
+          <a:lnRef idx="2">
+            <a:schemeClr val="accent1">
+              <a:shade val="15000"/>
+            </a:schemeClr>
+          </a:lnRef>
+          <a:fillRef idx="1">
+            <a:schemeClr val="accent1"/>
+          </a:fillRef>
+          <a:effectRef idx="0">
+            <a:schemeClr val="accent1"/>
+          </a:effectRef>
+          <a:fontRef idx="minor">
+            <a:schemeClr val="lt1"/>
+          </a:fontRef>
+        </p:style>
+        <p:txBody>
+          <a:bodyPr rtlCol="1" anchor="ctr"/>
+          <a:lstStyle/>
+          <a:p>
+            <a:pPr algn="ctr"/>
+            <a:endParaRPr lang="he-IL"/>
+          </a:p>
+        </p:txBody>
+      </p:sp>
+      <p:sp>
+        <p:nvSpPr>
+          <p:cNvPr id="21" name="מלבן: פינות מעוגלות 20">
+            <a:extLst>
+              <a:ext uri="{FF2B5EF4-FFF2-40B4-BE49-F238E27FC236}">
+                <a16:creationId xmlns:a16="http://schemas.microsoft.com/office/drawing/2014/main" id="{75761785-05B3-8A3B-1DB9-0812F82B09AF}"/>
+              </a:ext>
+            </a:extLst>
+          </p:cNvPr>
+          <p:cNvSpPr/>
+          <p:nvPr/>
+        </p:nvSpPr>
+        <p:spPr>
+          <a:xfrm>
+            <a:off x="8284464" y="3886200"/>
+            <a:ext cx="1069848" cy="658368"/>
+          </a:xfrm>
+          <a:prstGeom prst="roundRect">
+            <a:avLst/>
+          </a:prstGeom>
+        </p:spPr>
+        <p:style>
+          <a:lnRef idx="2">
+            <a:schemeClr val="accent1">
+              <a:shade val="15000"/>
+            </a:schemeClr>
+          </a:lnRef>
+          <a:fillRef idx="1">
+            <a:schemeClr val="accent1"/>
+          </a:fillRef>
+          <a:effectRef idx="0">
+            <a:schemeClr val="accent1"/>
+          </a:effectRef>
+          <a:fontRef idx="minor">
+            <a:schemeClr val="lt1"/>
+          </a:fontRef>
+        </p:style>
+        <p:txBody>
+          <a:bodyPr rtlCol="1" anchor="ctr"/>
+          <a:lstStyle/>
+          <a:p>
+            <a:pPr algn="ctr"/>
+            <a:endParaRPr lang="he-IL"/>
+          </a:p>
+        </p:txBody>
+      </p:sp>
+      <p:sp>
+        <p:nvSpPr>
+          <p:cNvPr id="22" name="מלבן: פינות מעוגלות 21">
+            <a:extLst>
+              <a:ext uri="{FF2B5EF4-FFF2-40B4-BE49-F238E27FC236}">
+                <a16:creationId xmlns:a16="http://schemas.microsoft.com/office/drawing/2014/main" id="{B6A8290A-5408-F755-9D30-0E5F34EAC8F7}"/>
+              </a:ext>
+            </a:extLst>
+          </p:cNvPr>
+          <p:cNvSpPr/>
+          <p:nvPr/>
+        </p:nvSpPr>
+        <p:spPr>
+          <a:xfrm>
+            <a:off x="8436864" y="4038600"/>
+            <a:ext cx="1069848" cy="658368"/>
+          </a:xfrm>
+          <a:prstGeom prst="roundRect">
+            <a:avLst/>
+          </a:prstGeom>
+        </p:spPr>
+        <p:style>
+          <a:lnRef idx="2">
+            <a:schemeClr val="accent1">
+              <a:shade val="15000"/>
+            </a:schemeClr>
+          </a:lnRef>
+          <a:fillRef idx="1">
+            <a:schemeClr val="accent1"/>
+          </a:fillRef>
+          <a:effectRef idx="0">
+            <a:schemeClr val="accent1"/>
+          </a:effectRef>
+          <a:fontRef idx="minor">
+            <a:schemeClr val="lt1"/>
+          </a:fontRef>
+        </p:style>
+        <p:txBody>
+          <a:bodyPr rtlCol="1" anchor="ctr"/>
+          <a:lstStyle/>
+          <a:p>
+            <a:pPr algn="ctr"/>
+            <a:endParaRPr lang="he-IL"/>
+          </a:p>
+        </p:txBody>
+      </p:sp>
+      <p:sp>
+        <p:nvSpPr>
+          <p:cNvPr id="23" name="מלבן: פינות מעוגלות 22">
+            <a:extLst>
+              <a:ext uri="{FF2B5EF4-FFF2-40B4-BE49-F238E27FC236}">
+                <a16:creationId xmlns:a16="http://schemas.microsoft.com/office/drawing/2014/main" id="{BB66B80A-CE4C-92D4-F7FC-8B8C4B1E4640}"/>
+              </a:ext>
+            </a:extLst>
+          </p:cNvPr>
+          <p:cNvSpPr/>
+          <p:nvPr/>
+        </p:nvSpPr>
+        <p:spPr>
+          <a:xfrm>
+            <a:off x="8589264" y="4191000"/>
+            <a:ext cx="1069848" cy="658368"/>
+          </a:xfrm>
+          <a:prstGeom prst="roundRect">
+            <a:avLst/>
+          </a:prstGeom>
+        </p:spPr>
+        <p:style>
+          <a:lnRef idx="2">
+            <a:schemeClr val="accent1">
+              <a:shade val="15000"/>
+            </a:schemeClr>
+          </a:lnRef>
+          <a:fillRef idx="1">
+            <a:schemeClr val="accent1"/>
+          </a:fillRef>
+          <a:effectRef idx="0">
+            <a:schemeClr val="accent1"/>
+          </a:effectRef>
+          <a:fontRef idx="minor">
+            <a:schemeClr val="lt1"/>
+          </a:fontRef>
+        </p:style>
+        <p:txBody>
+          <a:bodyPr rtlCol="1" anchor="ctr"/>
+          <a:lstStyle/>
+          <a:p>
+            <a:pPr algn="ctr"/>
+            <a:endParaRPr lang="he-IL"/>
+          </a:p>
+        </p:txBody>
+      </p:sp>
+      <p:sp>
+        <p:nvSpPr>
+          <p:cNvPr id="24" name="מלבן: פינות מעוגלות 23">
+            <a:extLst>
+              <a:ext uri="{FF2B5EF4-FFF2-40B4-BE49-F238E27FC236}">
+                <a16:creationId xmlns:a16="http://schemas.microsoft.com/office/drawing/2014/main" id="{39DE6F64-8F60-75FC-B54A-CDA019A7BAA1}"/>
+              </a:ext>
+            </a:extLst>
+          </p:cNvPr>
+          <p:cNvSpPr/>
+          <p:nvPr/>
+        </p:nvSpPr>
+        <p:spPr>
+          <a:xfrm>
+            <a:off x="8741664" y="4343400"/>
+            <a:ext cx="1069848" cy="658368"/>
+          </a:xfrm>
+          <a:prstGeom prst="roundRect">
+            <a:avLst/>
+          </a:prstGeom>
+        </p:spPr>
+        <p:style>
+          <a:lnRef idx="2">
+            <a:schemeClr val="accent1">
+              <a:shade val="15000"/>
+            </a:schemeClr>
+          </a:lnRef>
+          <a:fillRef idx="1">
+            <a:schemeClr val="accent1"/>
+          </a:fillRef>
+          <a:effectRef idx="0">
+            <a:schemeClr val="accent1"/>
+          </a:effectRef>
+          <a:fontRef idx="minor">
+            <a:schemeClr val="lt1"/>
+          </a:fontRef>
+        </p:style>
+        <p:txBody>
+          <a:bodyPr rtlCol="1" anchor="ctr"/>
+          <a:lstStyle/>
+          <a:p>
+            <a:pPr algn="ctr"/>
+            <a:endParaRPr lang="he-IL"/>
+          </a:p>
+        </p:txBody>
+      </p:sp>
+      <p:sp>
+        <p:nvSpPr>
+          <p:cNvPr id="25" name="מלבן: פינות מעוגלות 24">
+            <a:extLst>
+              <a:ext uri="{FF2B5EF4-FFF2-40B4-BE49-F238E27FC236}">
+                <a16:creationId xmlns:a16="http://schemas.microsoft.com/office/drawing/2014/main" id="{B7DD3882-4E0B-ECA2-0571-E6FB422EF5F2}"/>
+              </a:ext>
+            </a:extLst>
+          </p:cNvPr>
+          <p:cNvSpPr/>
+          <p:nvPr/>
+        </p:nvSpPr>
+        <p:spPr>
+          <a:xfrm>
+            <a:off x="8894064" y="4495800"/>
+            <a:ext cx="1069848" cy="658368"/>
+          </a:xfrm>
+          <a:prstGeom prst="roundRect">
+            <a:avLst/>
+          </a:prstGeom>
+        </p:spPr>
+        <p:style>
+          <a:lnRef idx="2">
+            <a:schemeClr val="accent1">
+              <a:shade val="15000"/>
+            </a:schemeClr>
+          </a:lnRef>
+          <a:fillRef idx="1">
+            <a:schemeClr val="accent1"/>
+          </a:fillRef>
+          <a:effectRef idx="0">
+            <a:schemeClr val="accent1"/>
+          </a:effectRef>
+          <a:fontRef idx="minor">
+            <a:schemeClr val="lt1"/>
+          </a:fontRef>
+        </p:style>
+        <p:txBody>
+          <a:bodyPr rtlCol="1" anchor="ctr"/>
+          <a:lstStyle/>
+          <a:p>
+            <a:pPr algn="ctr"/>
+            <a:endParaRPr lang="he-IL"/>
+          </a:p>
+        </p:txBody>
+      </p:sp>
+      <p:sp>
+        <p:nvSpPr>
+          <p:cNvPr id="26" name="מלבן: פינות מעוגלות 25">
+            <a:extLst>
+              <a:ext uri="{FF2B5EF4-FFF2-40B4-BE49-F238E27FC236}">
+                <a16:creationId xmlns:a16="http://schemas.microsoft.com/office/drawing/2014/main" id="{83FD5F9F-75E4-5CDE-8FC9-F989A9F633CF}"/>
+              </a:ext>
+            </a:extLst>
+          </p:cNvPr>
+          <p:cNvSpPr/>
+          <p:nvPr/>
+        </p:nvSpPr>
+        <p:spPr>
+          <a:xfrm>
+            <a:off x="9046464" y="4648200"/>
+            <a:ext cx="1069848" cy="658368"/>
+          </a:xfrm>
+          <a:prstGeom prst="roundRect">
+            <a:avLst/>
+          </a:prstGeom>
+        </p:spPr>
+        <p:style>
+          <a:lnRef idx="2">
+            <a:schemeClr val="accent1">
+              <a:shade val="15000"/>
+            </a:schemeClr>
+          </a:lnRef>
+          <a:fillRef idx="1">
+            <a:schemeClr val="accent1"/>
+          </a:fillRef>
+          <a:effectRef idx="0">
+            <a:schemeClr val="accent1"/>
+          </a:effectRef>
+          <a:fontRef idx="minor">
+            <a:schemeClr val="lt1"/>
+          </a:fontRef>
+        </p:style>
+        <p:txBody>
+          <a:bodyPr rtlCol="1" anchor="ctr"/>
+          <a:lstStyle/>
+          <a:p>
+            <a:pPr algn="ctr"/>
+            <a:endParaRPr lang="he-IL"/>
+          </a:p>
+        </p:txBody>
+      </p:sp>
+      <p:sp>
+        <p:nvSpPr>
+          <p:cNvPr id="27" name="מלבן: פינות מעוגלות 26">
+            <a:extLst>
+              <a:ext uri="{FF2B5EF4-FFF2-40B4-BE49-F238E27FC236}">
+                <a16:creationId xmlns:a16="http://schemas.microsoft.com/office/drawing/2014/main" id="{264CDDAF-0B63-B9CE-CE95-84218509D369}"/>
+              </a:ext>
+            </a:extLst>
+          </p:cNvPr>
+          <p:cNvSpPr/>
+          <p:nvPr/>
+        </p:nvSpPr>
+        <p:spPr>
+          <a:xfrm>
+            <a:off x="9198864" y="4800600"/>
+            <a:ext cx="1069848" cy="658368"/>
+          </a:xfrm>
+          <a:prstGeom prst="roundRect">
+            <a:avLst/>
+          </a:prstGeom>
+        </p:spPr>
+        <p:style>
+          <a:lnRef idx="2">
+            <a:schemeClr val="accent1">
+              <a:shade val="15000"/>
+            </a:schemeClr>
+          </a:lnRef>
+          <a:fillRef idx="1">
+            <a:schemeClr val="accent1"/>
+          </a:fillRef>
+          <a:effectRef idx="0">
+            <a:schemeClr val="accent1"/>
+          </a:effectRef>
+          <a:fontRef idx="minor">
+            <a:schemeClr val="lt1"/>
+          </a:fontRef>
+        </p:style>
+        <p:txBody>
+          <a:bodyPr rtlCol="1" anchor="ctr"/>
+          <a:lstStyle/>
+          <a:p>
+            <a:pPr algn="ctr"/>
+            <a:endParaRPr lang="he-IL"/>
+          </a:p>
+        </p:txBody>
+      </p:sp>
+      <p:sp>
+        <p:nvSpPr>
+          <p:cNvPr id="28" name="מלבן: פינות מעוגלות 27">
+            <a:extLst>
+              <a:ext uri="{FF2B5EF4-FFF2-40B4-BE49-F238E27FC236}">
+                <a16:creationId xmlns:a16="http://schemas.microsoft.com/office/drawing/2014/main" id="{2D1C3E30-AF17-0B90-EA21-AEFCC1880D4E}"/>
+              </a:ext>
+            </a:extLst>
+          </p:cNvPr>
+          <p:cNvSpPr/>
+          <p:nvPr/>
+        </p:nvSpPr>
+        <p:spPr>
+          <a:xfrm>
+            <a:off x="9351264" y="4953000"/>
+            <a:ext cx="1069848" cy="658368"/>
+          </a:xfrm>
+          <a:prstGeom prst="roundRect">
+            <a:avLst/>
+          </a:prstGeom>
+        </p:spPr>
+        <p:style>
+          <a:lnRef idx="2">
+            <a:schemeClr val="accent1">
+              <a:shade val="15000"/>
+            </a:schemeClr>
+          </a:lnRef>
+          <a:fillRef idx="1">
+            <a:schemeClr val="accent1"/>
+          </a:fillRef>
+          <a:effectRef idx="0">
+            <a:schemeClr val="accent1"/>
+          </a:effectRef>
+          <a:fontRef idx="minor">
+            <a:schemeClr val="lt1"/>
+          </a:fontRef>
+        </p:style>
+        <p:txBody>
+          <a:bodyPr rtlCol="1" anchor="ctr"/>
+          <a:lstStyle/>
+          <a:p>
+            <a:pPr algn="ctr"/>
+            <a:endParaRPr lang="he-IL"/>
+          </a:p>
+        </p:txBody>
+      </p:sp>
+      <p:sp>
+        <p:nvSpPr>
+          <p:cNvPr id="29" name="מלבן: פינות מעוגלות 28">
+            <a:extLst>
+              <a:ext uri="{FF2B5EF4-FFF2-40B4-BE49-F238E27FC236}">
+                <a16:creationId xmlns:a16="http://schemas.microsoft.com/office/drawing/2014/main" id="{0E05CCC6-03A8-E113-A602-11B45C320121}"/>
+              </a:ext>
+            </a:extLst>
+          </p:cNvPr>
+          <p:cNvSpPr/>
+          <p:nvPr/>
+        </p:nvSpPr>
+        <p:spPr>
+          <a:xfrm>
+            <a:off x="9503664" y="5105400"/>
+            <a:ext cx="1069848" cy="658368"/>
+          </a:xfrm>
+          <a:prstGeom prst="roundRect">
+            <a:avLst/>
+          </a:prstGeom>
+        </p:spPr>
+        <p:style>
+          <a:lnRef idx="2">
+            <a:schemeClr val="accent1">
+              <a:shade val="15000"/>
+            </a:schemeClr>
+          </a:lnRef>
+          <a:fillRef idx="1">
+            <a:schemeClr val="accent1"/>
+          </a:fillRef>
+          <a:effectRef idx="0">
+            <a:schemeClr val="accent1"/>
+          </a:effectRef>
+          <a:fontRef idx="minor">
+            <a:schemeClr val="lt1"/>
+          </a:fontRef>
+        </p:style>
+        <p:txBody>
+          <a:bodyPr rtlCol="1" anchor="ctr"/>
+          <a:lstStyle/>
+          <a:p>
+            <a:pPr algn="ctr"/>
+            <a:endParaRPr lang="he-IL"/>
+          </a:p>
+        </p:txBody>
+      </p:sp>
+      <p:sp>
+        <p:nvSpPr>
+          <p:cNvPr id="30" name="מלבן: פינות מעוגלות 29">
+            <a:extLst>
+              <a:ext uri="{FF2B5EF4-FFF2-40B4-BE49-F238E27FC236}">
+                <a16:creationId xmlns:a16="http://schemas.microsoft.com/office/drawing/2014/main" id="{2C011017-BB4E-3BDB-5690-9FCD9F37D299}"/>
+              </a:ext>
+            </a:extLst>
+          </p:cNvPr>
+          <p:cNvSpPr/>
+          <p:nvPr/>
+        </p:nvSpPr>
+        <p:spPr>
+          <a:xfrm>
+            <a:off x="9656064" y="5257800"/>
+            <a:ext cx="1069848" cy="658368"/>
+          </a:xfrm>
+          <a:prstGeom prst="roundRect">
+            <a:avLst/>
+          </a:prstGeom>
+        </p:spPr>
+        <p:style>
+          <a:lnRef idx="2">
+            <a:schemeClr val="accent1">
+              <a:shade val="15000"/>
+            </a:schemeClr>
+          </a:lnRef>
+          <a:fillRef idx="1">
+            <a:schemeClr val="accent1"/>
+          </a:fillRef>
+          <a:effectRef idx="0">
+            <a:schemeClr val="accent1"/>
+          </a:effectRef>
+          <a:fontRef idx="minor">
+            <a:schemeClr val="lt1"/>
+          </a:fontRef>
+        </p:style>
+        <p:txBody>
+          <a:bodyPr rtlCol="1" anchor="ctr"/>
+          <a:lstStyle/>
+          <a:p>
+            <a:pPr algn="ctr"/>
+            <a:endParaRPr lang="he-IL"/>
+          </a:p>
+        </p:txBody>
+      </p:sp>
+      <p:sp>
+        <p:nvSpPr>
+          <p:cNvPr id="31" name="מלבן: פינות מעוגלות 30">
+            <a:extLst>
+              <a:ext uri="{FF2B5EF4-FFF2-40B4-BE49-F238E27FC236}">
+                <a16:creationId xmlns:a16="http://schemas.microsoft.com/office/drawing/2014/main" id="{0B10D2AF-F43F-54B7-2C64-7FF8A643FC6D}"/>
+              </a:ext>
+            </a:extLst>
+          </p:cNvPr>
+          <p:cNvSpPr/>
+          <p:nvPr/>
+        </p:nvSpPr>
+        <p:spPr>
+          <a:xfrm>
+            <a:off x="9808464" y="5410200"/>
+            <a:ext cx="1069848" cy="658368"/>
+          </a:xfrm>
+          <a:prstGeom prst="roundRect">
+            <a:avLst/>
+          </a:prstGeom>
+        </p:spPr>
+        <p:style>
+          <a:lnRef idx="2">
+            <a:schemeClr val="accent1">
+              <a:shade val="15000"/>
+            </a:schemeClr>
+          </a:lnRef>
+          <a:fillRef idx="1">
+            <a:schemeClr val="accent1"/>
+          </a:fillRef>
+          <a:effectRef idx="0">
+            <a:schemeClr val="accent1"/>
+          </a:effectRef>
+          <a:fontRef idx="minor">
+            <a:schemeClr val="lt1"/>
+          </a:fontRef>
+        </p:style>
+        <p:txBody>
+          <a:bodyPr rtlCol="1" anchor="ctr"/>
+          <a:lstStyle/>
+          <a:p>
+            <a:pPr algn="ctr"/>
+            <a:endParaRPr lang="he-IL"/>
+          </a:p>
+        </p:txBody>
+      </p:sp>
+      <p:sp>
+        <p:nvSpPr>
+          <p:cNvPr id="32" name="מלבן: פינות מעוגלות 31">
+            <a:extLst>
+              <a:ext uri="{FF2B5EF4-FFF2-40B4-BE49-F238E27FC236}">
+                <a16:creationId xmlns:a16="http://schemas.microsoft.com/office/drawing/2014/main" id="{BA159A71-B60C-60CA-22BE-E66E934CB56A}"/>
+              </a:ext>
+            </a:extLst>
+          </p:cNvPr>
+          <p:cNvSpPr/>
+          <p:nvPr/>
+        </p:nvSpPr>
+        <p:spPr>
+          <a:xfrm>
+            <a:off x="9960864" y="5562600"/>
+            <a:ext cx="1069848" cy="658368"/>
+          </a:xfrm>
+          <a:prstGeom prst="roundRect">
+            <a:avLst/>
+          </a:prstGeom>
+        </p:spPr>
+        <p:style>
+          <a:lnRef idx="2">
+            <a:schemeClr val="accent1">
+              <a:shade val="15000"/>
+            </a:schemeClr>
+          </a:lnRef>
+          <a:fillRef idx="1">
+            <a:schemeClr val="accent1"/>
+          </a:fillRef>
+          <a:effectRef idx="0">
+            <a:schemeClr val="accent1"/>
+          </a:effectRef>
+          <a:fontRef idx="minor">
+            <a:schemeClr val="lt1"/>
+          </a:fontRef>
+        </p:style>
+        <p:txBody>
+          <a:bodyPr rtlCol="1" anchor="ctr"/>
+          <a:lstStyle/>
+          <a:p>
+            <a:pPr algn="ctr"/>
+            <a:endParaRPr lang="he-IL"/>
+          </a:p>
+        </p:txBody>
+      </p:sp>
+      <p:sp>
+        <p:nvSpPr>
+          <p:cNvPr id="33" name="מלבן: פינות מעוגלות 32">
+            <a:extLst>
+              <a:ext uri="{FF2B5EF4-FFF2-40B4-BE49-F238E27FC236}">
+                <a16:creationId xmlns:a16="http://schemas.microsoft.com/office/drawing/2014/main" id="{F73F3FF8-3928-46F5-E151-1E9997696CDE}"/>
+              </a:ext>
+            </a:extLst>
+          </p:cNvPr>
+          <p:cNvSpPr/>
+          <p:nvPr/>
+        </p:nvSpPr>
+        <p:spPr>
+          <a:xfrm>
+            <a:off x="10113264" y="5715000"/>
+            <a:ext cx="1069848" cy="658368"/>
+          </a:xfrm>
+          <a:prstGeom prst="roundRect">
+            <a:avLst/>
+          </a:prstGeom>
+        </p:spPr>
+        <p:style>
+          <a:lnRef idx="2">
+            <a:schemeClr val="accent1">
+              <a:shade val="15000"/>
+            </a:schemeClr>
+          </a:lnRef>
+          <a:fillRef idx="1">
+            <a:schemeClr val="accent1"/>
+          </a:fillRef>
+          <a:effectRef idx="0">
+            <a:schemeClr val="accent1"/>
+          </a:effectRef>
+          <a:fontRef idx="minor">
+            <a:schemeClr val="lt1"/>
+          </a:fontRef>
+        </p:style>
+        <p:txBody>
+          <a:bodyPr rtlCol="1" anchor="ctr"/>
+          <a:lstStyle/>
+          <a:p>
+            <a:pPr algn="ctr"/>
+            <a:endParaRPr lang="he-IL"/>
+          </a:p>
+        </p:txBody>
+      </p:sp>
+      <p:sp>
+        <p:nvSpPr>
+          <p:cNvPr id="34" name="מלבן: פינות מעוגלות 33">
+            <a:extLst>
+              <a:ext uri="{FF2B5EF4-FFF2-40B4-BE49-F238E27FC236}">
+                <a16:creationId xmlns:a16="http://schemas.microsoft.com/office/drawing/2014/main" id="{44A6593B-2F76-66F8-A6AD-1FC9A39A3F37}"/>
+              </a:ext>
+            </a:extLst>
+          </p:cNvPr>
+          <p:cNvSpPr/>
+          <p:nvPr/>
+        </p:nvSpPr>
+        <p:spPr>
+          <a:xfrm>
+            <a:off x="10265664" y="5867400"/>
+            <a:ext cx="1069848" cy="658368"/>
+          </a:xfrm>
+          <a:prstGeom prst="roundRect">
+            <a:avLst/>
+          </a:prstGeom>
+        </p:spPr>
+        <p:style>
+          <a:lnRef idx="2">
+            <a:schemeClr val="accent1">
+              <a:shade val="15000"/>
+            </a:schemeClr>
+          </a:lnRef>
+          <a:fillRef idx="1">
+            <a:schemeClr val="accent1"/>
+          </a:fillRef>
+          <a:effectRef idx="0">
+            <a:schemeClr val="accent1"/>
+          </a:effectRef>
+          <a:fontRef idx="minor">
+            <a:schemeClr val="lt1"/>
+          </a:fontRef>
+        </p:style>
+        <p:txBody>
+          <a:bodyPr rtlCol="1" anchor="ctr"/>
+          <a:lstStyle/>
+          <a:p>
+            <a:pPr algn="ctr"/>
+            <a:endParaRPr lang="he-IL"/>
+          </a:p>
+        </p:txBody>
+      </p:sp>
+      <p:sp>
+        <p:nvSpPr>
+          <p:cNvPr id="35" name="מלבן: פינות מעוגלות 34">
+            <a:extLst>
+              <a:ext uri="{FF2B5EF4-FFF2-40B4-BE49-F238E27FC236}">
+                <a16:creationId xmlns:a16="http://schemas.microsoft.com/office/drawing/2014/main" id="{39532275-781A-961F-3A66-111FF6AF3C7B}"/>
+              </a:ext>
+            </a:extLst>
+          </p:cNvPr>
+          <p:cNvSpPr/>
+          <p:nvPr/>
+        </p:nvSpPr>
+        <p:spPr>
+          <a:xfrm>
+            <a:off x="10418064" y="6019800"/>
+            <a:ext cx="1069848" cy="658368"/>
+          </a:xfrm>
+          <a:prstGeom prst="roundRect">
+            <a:avLst/>
+          </a:prstGeom>
+        </p:spPr>
+        <p:style>
+          <a:lnRef idx="2">
+            <a:schemeClr val="accent1">
+              <a:shade val="15000"/>
+            </a:schemeClr>
+          </a:lnRef>
+          <a:fillRef idx="1">
+            <a:schemeClr val="accent1"/>
+          </a:fillRef>
+          <a:effectRef idx="0">
+            <a:schemeClr val="accent1"/>
+          </a:effectRef>
+          <a:fontRef idx="minor">
+            <a:schemeClr val="lt1"/>
+          </a:fontRef>
+        </p:style>
+        <p:txBody>
+          <a:bodyPr rtlCol="1" anchor="ctr"/>
+          <a:lstStyle/>
+          <a:p>
+            <a:pPr algn="ctr"/>
+            <a:endParaRPr lang="he-IL"/>
+          </a:p>
+        </p:txBody>
+      </p:sp>
+      <p:sp>
+        <p:nvSpPr>
+          <p:cNvPr id="36" name="מלבן: פינות מעוגלות 35">
+            <a:extLst>
+              <a:ext uri="{FF2B5EF4-FFF2-40B4-BE49-F238E27FC236}">
+                <a16:creationId xmlns:a16="http://schemas.microsoft.com/office/drawing/2014/main" id="{0C43D0E5-60EF-B6FD-DE42-247B5BE0762F}"/>
+              </a:ext>
+            </a:extLst>
+          </p:cNvPr>
+          <p:cNvSpPr/>
+          <p:nvPr/>
+        </p:nvSpPr>
+        <p:spPr>
+          <a:xfrm>
+            <a:off x="10570464" y="6172200"/>
+            <a:ext cx="1069848" cy="658368"/>
+          </a:xfrm>
+          <a:prstGeom prst="roundRect">
+            <a:avLst/>
+          </a:prstGeom>
+        </p:spPr>
+        <p:style>
+          <a:lnRef idx="2">
+            <a:schemeClr val="accent1">
+              <a:shade val="15000"/>
+            </a:schemeClr>
+          </a:lnRef>
+          <a:fillRef idx="1">
+            <a:schemeClr val="accent1"/>
+          </a:fillRef>
+          <a:effectRef idx="0">
+            <a:schemeClr val="accent1"/>
+          </a:effectRef>
+          <a:fontRef idx="minor">
+            <a:schemeClr val="lt1"/>
+          </a:fontRef>
+        </p:style>
+        <p:txBody>
+          <a:bodyPr rtlCol="1" anchor="ctr"/>
+          <a:lstStyle/>
+          <a:p>
+            <a:pPr algn="ctr"/>
+            <a:endParaRPr lang="he-IL"/>
+          </a:p>
+        </p:txBody>
+      </p:sp>
+      <p:pic>
+        <p:nvPicPr>
+          <p:cNvPr id="37" name="תמונה 36">
+            <a:extLst>
+              <a:ext uri="{FF2B5EF4-FFF2-40B4-BE49-F238E27FC236}">
+                <a16:creationId xmlns:a16="http://schemas.microsoft.com/office/drawing/2014/main" id="{38FC7DA8-278D-019A-3C7E-6EC0646F492E}"/>
+              </a:ext>
+            </a:extLst>
+          </p:cNvPr>
+          <p:cNvPicPr>
+            <a:picLocks noChangeAspect="1"/>
+          </p:cNvPicPr>
+          <p:nvPr/>
+        </p:nvPicPr>
+        <p:blipFill>
+          <a:blip r:embed="rId2"/>
+          <a:stretch>
+            <a:fillRect/>
+          </a:stretch>
+        </p:blipFill>
+        <p:spPr>
+          <a:xfrm>
+            <a:off x="2496265" y="2337380"/>
+            <a:ext cx="1085182" cy="670618"/>
+          </a:xfrm>
+          <a:prstGeom prst="rect">
+            <a:avLst/>
+          </a:prstGeom>
+        </p:spPr>
+      </p:pic>
     </p:spTree>
     <p:extLst>
       <p:ext uri="{BB962C8B-B14F-4D97-AF65-F5344CB8AC3E}">
